--- a/doc/ScoreCaddie_분석설계_요약.pptx
+++ b/doc/ScoreCaddie_분석설계_요약.pptx
@@ -2407,6 +2407,10 @@
           </a:solidFill>
           <a:ln/>
         </p:spPr>
+        <p:txBody>
+          <a:bodyPr/>
+          <a:p/>
+        </p:txBody>
       </p:sp>
       <p:sp>
         <p:nvSpPr>
@@ -2427,6 +2431,10 @@
           </a:solidFill>
           <a:ln/>
         </p:spPr>
+        <p:txBody>
+          <a:bodyPr/>
+          <a:p/>
+        </p:txBody>
       </p:sp>
       <p:sp>
         <p:nvSpPr>
@@ -2447,6 +2455,10 @@
           </a:solidFill>
           <a:ln/>
         </p:spPr>
+        <p:txBody>
+          <a:bodyPr/>
+          <a:p/>
+        </p:txBody>
       </p:sp>
       <p:sp>
         <p:nvSpPr>
@@ -2733,6 +2745,10 @@
           </a:solidFill>
           <a:ln/>
         </p:spPr>
+        <p:txBody>
+          <a:bodyPr/>
+          <a:p/>
+        </p:txBody>
       </p:sp>
       <p:sp>
         <p:nvSpPr>
@@ -2831,6 +2847,10 @@
           </a:solidFill>
           <a:ln/>
         </p:spPr>
+        <p:txBody>
+          <a:bodyPr/>
+          <a:p/>
+        </p:txBody>
       </p:sp>
       <p:sp>
         <p:nvSpPr>
@@ -2892,6 +2912,10 @@
           </a:solidFill>
           <a:ln/>
         </p:spPr>
+        <p:txBody>
+          <a:bodyPr/>
+          <a:p/>
+        </p:txBody>
       </p:sp>
       <p:sp>
         <p:nvSpPr>
@@ -2912,6 +2936,10 @@
           </a:solidFill>
           <a:ln/>
         </p:spPr>
+        <p:txBody>
+          <a:bodyPr/>
+          <a:p/>
+        </p:txBody>
       </p:sp>
       <p:sp>
         <p:nvSpPr>
@@ -3054,6 +3082,10 @@
           </a:solidFill>
           <a:ln/>
         </p:spPr>
+        <p:txBody>
+          <a:bodyPr/>
+          <a:p/>
+        </p:txBody>
       </p:sp>
       <p:sp>
         <p:nvSpPr>
@@ -3074,6 +3106,10 @@
           </a:solidFill>
           <a:ln/>
         </p:spPr>
+        <p:txBody>
+          <a:bodyPr/>
+          <a:p/>
+        </p:txBody>
       </p:sp>
       <p:sp>
         <p:nvSpPr>
@@ -3221,6 +3257,10 @@
             <a:prstDash val="solid"/>
           </a:ln>
         </p:spPr>
+        <p:txBody>
+          <a:bodyPr/>
+          <a:p/>
+        </p:txBody>
       </p:sp>
       <p:sp>
         <p:nvSpPr>
@@ -3324,6 +3364,10 @@
           </a:solidFill>
           <a:ln/>
         </p:spPr>
+        <p:txBody>
+          <a:bodyPr/>
+          <a:p/>
+        </p:txBody>
       </p:sp>
       <p:sp>
         <p:nvSpPr>
@@ -3457,6 +3501,10 @@
           </a:solidFill>
           <a:ln/>
         </p:spPr>
+        <p:txBody>
+          <a:bodyPr/>
+          <a:p/>
+        </p:txBody>
       </p:sp>
       <p:sp>
         <p:nvSpPr>
@@ -3555,6 +3603,10 @@
           </a:solidFill>
           <a:ln/>
         </p:spPr>
+        <p:txBody>
+          <a:bodyPr/>
+          <a:p/>
+        </p:txBody>
       </p:sp>
       <p:sp>
         <p:nvSpPr>
@@ -3616,6 +3668,10 @@
           </a:solidFill>
           <a:ln/>
         </p:spPr>
+        <p:txBody>
+          <a:bodyPr/>
+          <a:p/>
+        </p:txBody>
       </p:sp>
       <p:sp>
         <p:nvSpPr>
@@ -3636,6 +3692,10 @@
           </a:solidFill>
           <a:ln/>
         </p:spPr>
+        <p:txBody>
+          <a:bodyPr/>
+          <a:p/>
+        </p:txBody>
       </p:sp>
       <p:sp>
         <p:nvSpPr>
@@ -3709,7 +3769,7 @@
                 <a:ea typeface="Calibri" pitchFamily="34" charset="-122"/>
                 <a:cs typeface="Calibri" pitchFamily="34" charset="-120"/>
               </a:rPr>
-              <a:t>골프장 Par 관리 목록</a:t>
+              <a:t>골프장 관리 목록</a:t>
             </a:r>
             <a:endParaRPr lang="en-US" sz="1350" dirty="0"/>
           </a:p>
@@ -3817,6 +3877,10 @@
           </a:solidFill>
           <a:ln/>
         </p:spPr>
+        <p:txBody>
+          <a:bodyPr/>
+          <a:p/>
+        </p:txBody>
       </p:sp>
       <p:sp>
         <p:nvSpPr>
@@ -3837,6 +3901,10 @@
           </a:solidFill>
           <a:ln/>
         </p:spPr>
+        <p:txBody>
+          <a:bodyPr/>
+          <a:p/>
+        </p:txBody>
       </p:sp>
       <p:sp>
         <p:nvSpPr>
@@ -4018,6 +4086,10 @@
           </a:solidFill>
           <a:ln/>
         </p:spPr>
+        <p:txBody>
+          <a:bodyPr/>
+          <a:p/>
+        </p:txBody>
       </p:sp>
       <p:sp>
         <p:nvSpPr>
@@ -4038,6 +4110,10 @@
           </a:solidFill>
           <a:ln/>
         </p:spPr>
+        <p:txBody>
+          <a:bodyPr/>
+          <a:p/>
+        </p:txBody>
       </p:sp>
       <p:sp>
         <p:nvSpPr>
@@ -4219,6 +4295,10 @@
           </a:solidFill>
           <a:ln/>
         </p:spPr>
+        <p:txBody>
+          <a:bodyPr/>
+          <a:p/>
+        </p:txBody>
       </p:sp>
       <p:sp>
         <p:nvSpPr>
@@ -4239,6 +4319,10 @@
           </a:solidFill>
           <a:ln/>
         </p:spPr>
+        <p:txBody>
+          <a:bodyPr/>
+          <a:p/>
+        </p:txBody>
       </p:sp>
       <p:sp>
         <p:nvSpPr>
@@ -4450,6 +4534,10 @@
           </a:solidFill>
           <a:ln/>
         </p:spPr>
+        <p:txBody>
+          <a:bodyPr/>
+          <a:p/>
+        </p:txBody>
       </p:sp>
       <p:sp>
         <p:nvSpPr>
@@ -4548,6 +4636,10 @@
           </a:solidFill>
           <a:ln/>
         </p:spPr>
+        <p:txBody>
+          <a:bodyPr/>
+          <a:p/>
+        </p:txBody>
       </p:sp>
       <p:sp>
         <p:nvSpPr>
@@ -4609,6 +4701,10 @@
           </a:solidFill>
           <a:ln/>
         </p:spPr>
+        <p:txBody>
+          <a:bodyPr/>
+          <a:p/>
+        </p:txBody>
       </p:sp>
       <p:sp>
         <p:nvSpPr>
@@ -4782,6 +4878,10 @@
           </a:solidFill>
           <a:ln/>
         </p:spPr>
+        <p:txBody>
+          <a:bodyPr/>
+          <a:p/>
+        </p:txBody>
       </p:sp>
       <p:sp>
         <p:nvSpPr>
@@ -4985,6 +5085,10 @@
           </a:solidFill>
           <a:ln/>
         </p:spPr>
+        <p:txBody>
+          <a:bodyPr/>
+          <a:p/>
+        </p:txBody>
       </p:sp>
       <p:sp>
         <p:nvSpPr>
@@ -5083,6 +5187,10 @@
           </a:solidFill>
           <a:ln/>
         </p:spPr>
+        <p:txBody>
+          <a:bodyPr/>
+          <a:p/>
+        </p:txBody>
       </p:sp>
       <p:sp>
         <p:nvSpPr>
@@ -5144,6 +5252,10 @@
           </a:solidFill>
           <a:ln/>
         </p:spPr>
+        <p:txBody>
+          <a:bodyPr/>
+          <a:p/>
+        </p:txBody>
       </p:sp>
       <p:sp>
         <p:nvSpPr>
@@ -5299,6 +5411,10 @@
           </a:solidFill>
           <a:ln/>
         </p:spPr>
+        <p:txBody>
+          <a:bodyPr/>
+          <a:p/>
+        </p:txBody>
       </p:sp>
       <p:sp>
         <p:nvSpPr>
@@ -5523,6 +5639,10 @@
           </a:solidFill>
           <a:ln/>
         </p:spPr>
+        <p:txBody>
+          <a:bodyPr/>
+          <a:p/>
+        </p:txBody>
       </p:sp>
       <p:sp>
         <p:nvSpPr>
@@ -5621,6 +5741,10 @@
           </a:solidFill>
           <a:ln/>
         </p:spPr>
+        <p:txBody>
+          <a:bodyPr/>
+          <a:p/>
+        </p:txBody>
       </p:sp>
       <p:sp>
         <p:nvSpPr>
@@ -5682,6 +5806,10 @@
           </a:solidFill>
           <a:ln/>
         </p:spPr>
+        <p:txBody>
+          <a:bodyPr/>
+          <a:p/>
+        </p:txBody>
       </p:sp>
       <p:sp>
         <p:nvSpPr>
@@ -5702,6 +5830,10 @@
           </a:solidFill>
           <a:ln/>
         </p:spPr>
+        <p:txBody>
+          <a:bodyPr/>
+          <a:p/>
+        </p:txBody>
       </p:sp>
       <p:sp>
         <p:nvSpPr>
@@ -5844,6 +5976,10 @@
           </a:solidFill>
           <a:ln/>
         </p:spPr>
+        <p:txBody>
+          <a:bodyPr/>
+          <a:p/>
+        </p:txBody>
       </p:sp>
       <p:sp>
         <p:nvSpPr>
@@ -5864,6 +6000,10 @@
           </a:solidFill>
           <a:ln/>
         </p:spPr>
+        <p:txBody>
+          <a:bodyPr/>
+          <a:p/>
+        </p:txBody>
       </p:sp>
       <p:sp>
         <p:nvSpPr>
@@ -6006,6 +6146,10 @@
           </a:solidFill>
           <a:ln/>
         </p:spPr>
+        <p:txBody>
+          <a:bodyPr/>
+          <a:p/>
+        </p:txBody>
       </p:sp>
       <p:sp>
         <p:nvSpPr>
@@ -6026,6 +6170,10 @@
           </a:solidFill>
           <a:ln/>
         </p:spPr>
+        <p:txBody>
+          <a:bodyPr/>
+          <a:p/>
+        </p:txBody>
       </p:sp>
       <p:sp>
         <p:nvSpPr>
@@ -6198,6 +6346,10 @@
           </a:solidFill>
           <a:ln/>
         </p:spPr>
+        <p:txBody>
+          <a:bodyPr/>
+          <a:p/>
+        </p:txBody>
       </p:sp>
       <p:sp>
         <p:nvSpPr>
@@ -6296,6 +6448,10 @@
           </a:solidFill>
           <a:ln/>
         </p:spPr>
+        <p:txBody>
+          <a:bodyPr/>
+          <a:p/>
+        </p:txBody>
       </p:sp>
       <p:sp>
         <p:nvSpPr>
@@ -6357,6 +6513,10 @@
           </a:solidFill>
           <a:ln/>
         </p:spPr>
+        <p:txBody>
+          <a:bodyPr/>
+          <a:p/>
+        </p:txBody>
       </p:sp>
       <p:sp>
         <p:nvSpPr>
@@ -6620,6 +6780,10 @@
           </a:solidFill>
           <a:ln/>
         </p:spPr>
+        <p:txBody>
+          <a:bodyPr/>
+          <a:p/>
+        </p:txBody>
       </p:sp>
       <p:sp>
         <p:nvSpPr>
@@ -6805,6 +6969,10 @@
           </a:solidFill>
           <a:ln/>
         </p:spPr>
+        <p:txBody>
+          <a:bodyPr/>
+          <a:p/>
+        </p:txBody>
       </p:sp>
       <p:sp>
         <p:nvSpPr>
@@ -6903,6 +7071,10 @@
           </a:solidFill>
           <a:ln/>
         </p:spPr>
+        <p:txBody>
+          <a:bodyPr/>
+          <a:p/>
+        </p:txBody>
       </p:sp>
       <p:sp>
         <p:nvSpPr>
@@ -6964,6 +7136,10 @@
           </a:solidFill>
           <a:ln/>
         </p:spPr>
+        <p:txBody>
+          <a:bodyPr/>
+          <a:p/>
+        </p:txBody>
       </p:sp>
       <p:sp>
         <p:nvSpPr>
@@ -6984,6 +7160,10 @@
           </a:solidFill>
           <a:ln/>
         </p:spPr>
+        <p:txBody>
+          <a:bodyPr/>
+          <a:p/>
+        </p:txBody>
       </p:sp>
       <p:sp>
         <p:nvSpPr>
@@ -7168,6 +7348,10 @@
           </a:solidFill>
           <a:ln/>
         </p:spPr>
+        <p:txBody>
+          <a:bodyPr/>
+          <a:p/>
+        </p:txBody>
       </p:sp>
       <p:sp>
         <p:nvSpPr>
@@ -7188,6 +7372,10 @@
           </a:solidFill>
           <a:ln/>
         </p:spPr>
+        <p:txBody>
+          <a:bodyPr/>
+          <a:p/>
+        </p:txBody>
       </p:sp>
       <p:sp>
         <p:nvSpPr>
@@ -7372,6 +7560,10 @@
           </a:solidFill>
           <a:ln/>
         </p:spPr>
+        <p:txBody>
+          <a:bodyPr/>
+          <a:p/>
+        </p:txBody>
       </p:sp>
       <p:sp>
         <p:nvSpPr>
@@ -7392,6 +7584,10 @@
           </a:solidFill>
           <a:ln/>
         </p:spPr>
+        <p:txBody>
+          <a:bodyPr/>
+          <a:p/>
+        </p:txBody>
       </p:sp>
       <p:sp>
         <p:nvSpPr>
@@ -7576,6 +7772,10 @@
           </a:solidFill>
           <a:ln/>
         </p:spPr>
+        <p:txBody>
+          <a:bodyPr/>
+          <a:p/>
+        </p:txBody>
       </p:sp>
       <p:sp>
         <p:nvSpPr>
@@ -7596,6 +7796,10 @@
           </a:solidFill>
           <a:ln/>
         </p:spPr>
+        <p:txBody>
+          <a:bodyPr/>
+          <a:p/>
+        </p:txBody>
       </p:sp>
       <p:sp>
         <p:nvSpPr>
@@ -7810,6 +8014,10 @@
           </a:solidFill>
           <a:ln/>
         </p:spPr>
+        <p:txBody>
+          <a:bodyPr/>
+          <a:p/>
+        </p:txBody>
       </p:sp>
       <p:sp>
         <p:nvSpPr>
@@ -7908,6 +8116,10 @@
           </a:solidFill>
           <a:ln/>
         </p:spPr>
+        <p:txBody>
+          <a:bodyPr/>
+          <a:p/>
+        </p:txBody>
       </p:sp>
       <p:sp>
         <p:nvSpPr>
@@ -7974,6 +8186,10 @@
             <a:prstDash val="solid"/>
           </a:ln>
         </p:spPr>
+        <p:txBody>
+          <a:bodyPr/>
+          <a:p/>
+        </p:txBody>
       </p:sp>
       <p:sp>
         <p:nvSpPr>
@@ -8082,6 +8298,10 @@
             <a:prstDash val="solid"/>
           </a:ln>
         </p:spPr>
+        <p:txBody>
+          <a:bodyPr/>
+          <a:p/>
+        </p:txBody>
       </p:sp>
       <p:sp>
         <p:nvSpPr>
@@ -8190,6 +8410,10 @@
             <a:prstDash val="solid"/>
           </a:ln>
         </p:spPr>
+        <p:txBody>
+          <a:bodyPr/>
+          <a:p/>
+        </p:txBody>
       </p:sp>
       <p:sp>
         <p:nvSpPr>
@@ -8298,6 +8522,10 @@
             <a:prstDash val="solid"/>
           </a:ln>
         </p:spPr>
+        <p:txBody>
+          <a:bodyPr/>
+          <a:p/>
+        </p:txBody>
       </p:sp>
       <p:sp>
         <p:nvSpPr>
@@ -8431,6 +8659,10 @@
           </a:solidFill>
           <a:ln/>
         </p:spPr>
+        <p:txBody>
+          <a:bodyPr/>
+          <a:p/>
+        </p:txBody>
       </p:sp>
       <p:sp>
         <p:nvSpPr>
@@ -8451,6 +8683,10 @@
           </a:solidFill>
           <a:ln/>
         </p:spPr>
+        <p:txBody>
+          <a:bodyPr/>
+          <a:p/>
+        </p:txBody>
       </p:sp>
       <p:sp>
         <p:nvSpPr>
@@ -8620,6 +8856,10 @@
           </a:solidFill>
           <a:ln/>
         </p:spPr>
+        <p:txBody>
+          <a:bodyPr/>
+          <a:p/>
+        </p:txBody>
       </p:sp>
       <p:sp>
         <p:nvSpPr>
@@ -8679,6 +8919,10 @@
           </a:solidFill>
           <a:ln/>
         </p:spPr>
+        <p:txBody>
+          <a:bodyPr/>
+          <a:p/>
+        </p:txBody>
       </p:sp>
       <p:sp>
         <p:nvSpPr>
@@ -8782,6 +9026,10 @@
           </a:solidFill>
           <a:ln/>
         </p:spPr>
+        <p:txBody>
+          <a:bodyPr/>
+          <a:p/>
+        </p:txBody>
       </p:sp>
       <p:sp>
         <p:nvSpPr>
@@ -8923,6 +9171,10 @@
           </a:solidFill>
           <a:ln/>
         </p:spPr>
+        <p:txBody>
+          <a:bodyPr/>
+          <a:p/>
+        </p:txBody>
       </p:sp>
       <p:sp>
         <p:nvSpPr>
@@ -9023,6 +9275,10 @@
           </a:solidFill>
           <a:ln/>
         </p:spPr>
+        <p:txBody>
+          <a:bodyPr/>
+          <a:p/>
+        </p:txBody>
       </p:sp>
       <p:sp>
         <p:nvSpPr>
@@ -9140,6 +9396,10 @@
           </a:solidFill>
           <a:ln/>
         </p:spPr>
+        <p:txBody>
+          <a:bodyPr/>
+          <a:p/>
+        </p:txBody>
       </p:sp>
       <p:sp>
         <p:nvSpPr>
@@ -9326,6 +9586,10 @@
           </a:solidFill>
           <a:ln/>
         </p:spPr>
+        <p:txBody>
+          <a:bodyPr/>
+          <a:p/>
+        </p:txBody>
       </p:sp>
       <p:sp>
         <p:nvSpPr>
@@ -9424,6 +9688,10 @@
           </a:solidFill>
           <a:ln/>
         </p:spPr>
+        <p:txBody>
+          <a:bodyPr/>
+          <a:p/>
+        </p:txBody>
       </p:sp>
       <p:sp>
         <p:nvSpPr>
@@ -9485,6 +9753,10 @@
           </a:solidFill>
           <a:ln/>
         </p:spPr>
+        <p:txBody>
+          <a:bodyPr/>
+          <a:p/>
+        </p:txBody>
       </p:sp>
       <p:sp>
         <p:nvSpPr>
@@ -9505,6 +9777,10 @@
           </a:solidFill>
           <a:ln/>
         </p:spPr>
+        <p:txBody>
+          <a:bodyPr/>
+          <a:p/>
+        </p:txBody>
       </p:sp>
       <p:sp>
         <p:nvSpPr>
@@ -9647,6 +9923,10 @@
           </a:solidFill>
           <a:ln/>
         </p:spPr>
+        <p:txBody>
+          <a:bodyPr/>
+          <a:p/>
+        </p:txBody>
       </p:sp>
       <p:sp>
         <p:nvSpPr>
@@ -9667,6 +9947,10 @@
           </a:solidFill>
           <a:ln/>
         </p:spPr>
+        <p:txBody>
+          <a:bodyPr/>
+          <a:p/>
+        </p:txBody>
       </p:sp>
       <p:sp>
         <p:nvSpPr>
@@ -9809,6 +10093,10 @@
           </a:solidFill>
           <a:ln/>
         </p:spPr>
+        <p:txBody>
+          <a:bodyPr/>
+          <a:p/>
+        </p:txBody>
       </p:sp>
       <p:sp>
         <p:nvSpPr>
@@ -9829,6 +10117,10 @@
           </a:solidFill>
           <a:ln/>
         </p:spPr>
+        <p:txBody>
+          <a:bodyPr/>
+          <a:p/>
+        </p:txBody>
       </p:sp>
       <p:sp>
         <p:nvSpPr>
@@ -9971,6 +10263,10 @@
           </a:solidFill>
           <a:ln/>
         </p:spPr>
+        <p:txBody>
+          <a:bodyPr/>
+          <a:p/>
+        </p:txBody>
       </p:sp>
       <p:sp>
         <p:nvSpPr>
@@ -9991,6 +10287,10 @@
           </a:solidFill>
           <a:ln/>
         </p:spPr>
+        <p:txBody>
+          <a:bodyPr/>
+          <a:p/>
+        </p:txBody>
       </p:sp>
       <p:sp>
         <p:nvSpPr>
@@ -10133,6 +10433,10 @@
           </a:solidFill>
           <a:ln/>
         </p:spPr>
+        <p:txBody>
+          <a:bodyPr/>
+          <a:p/>
+        </p:txBody>
       </p:sp>
       <p:sp>
         <p:nvSpPr>
@@ -10153,6 +10457,10 @@
           </a:solidFill>
           <a:ln/>
         </p:spPr>
+        <p:txBody>
+          <a:bodyPr/>
+          <a:p/>
+        </p:txBody>
       </p:sp>
       <p:sp>
         <p:nvSpPr>
@@ -10295,6 +10603,10 @@
           </a:solidFill>
           <a:ln/>
         </p:spPr>
+        <p:txBody>
+          <a:bodyPr/>
+          <a:p/>
+        </p:txBody>
       </p:sp>
       <p:sp>
         <p:nvSpPr>
@@ -10315,6 +10627,10 @@
           </a:solidFill>
           <a:ln/>
         </p:spPr>
+        <p:txBody>
+          <a:bodyPr/>
+          <a:p/>
+        </p:txBody>
       </p:sp>
       <p:sp>
         <p:nvSpPr>
@@ -10457,6 +10773,10 @@
           </a:solidFill>
           <a:ln/>
         </p:spPr>
+        <p:txBody>
+          <a:bodyPr/>
+          <a:p/>
+        </p:txBody>
       </p:sp>
       <p:sp>
         <p:nvSpPr>
@@ -10477,6 +10797,10 @@
           </a:solidFill>
           <a:ln/>
         </p:spPr>
+        <p:txBody>
+          <a:bodyPr/>
+          <a:p/>
+        </p:txBody>
       </p:sp>
       <p:sp>
         <p:nvSpPr>
@@ -10550,7 +10874,7 @@
                 <a:ea typeface="Calibri" pitchFamily="34" charset="-122"/>
                 <a:cs typeface="Calibri" pitchFamily="34" charset="-120"/>
               </a:rPr>
-              <a:t>관리자 골프장 Par 관리</a:t>
+              <a:t>관리자 골프장 관리</a:t>
             </a:r>
             <a:endParaRPr lang="en-US" sz="1250" dirty="0"/>
           </a:p>
@@ -10619,6 +10943,10 @@
           </a:solidFill>
           <a:ln/>
         </p:spPr>
+        <p:txBody>
+          <a:bodyPr/>
+          <a:p/>
+        </p:txBody>
       </p:sp>
       <p:sp>
         <p:nvSpPr>
@@ -10639,6 +10967,10 @@
           </a:solidFill>
           <a:ln/>
         </p:spPr>
+        <p:txBody>
+          <a:bodyPr/>
+          <a:p/>
+        </p:txBody>
       </p:sp>
       <p:sp>
         <p:nvSpPr>
@@ -10811,6 +11143,10 @@
           </a:solidFill>
           <a:ln/>
         </p:spPr>
+        <p:txBody>
+          <a:bodyPr/>
+          <a:p/>
+        </p:txBody>
       </p:sp>
       <p:sp>
         <p:nvSpPr>
@@ -10909,6 +11245,10 @@
           </a:solidFill>
           <a:ln/>
         </p:spPr>
+        <p:txBody>
+          <a:bodyPr/>
+          <a:p/>
+        </p:txBody>
       </p:sp>
       <p:sp>
         <p:nvSpPr>
@@ -12718,6 +13058,10 @@
           </a:solidFill>
           <a:ln/>
         </p:spPr>
+        <p:txBody>
+          <a:bodyPr/>
+          <a:p/>
+        </p:txBody>
       </p:sp>
       <p:sp>
         <p:nvSpPr>
@@ -12816,6 +13160,10 @@
           </a:solidFill>
           <a:ln/>
         </p:spPr>
+        <p:txBody>
+          <a:bodyPr/>
+          <a:p/>
+        </p:txBody>
       </p:sp>
       <p:sp>
         <p:nvSpPr>
@@ -12882,6 +13230,10 @@
             <a:prstDash val="solid"/>
           </a:ln>
         </p:spPr>
+        <p:txBody>
+          <a:bodyPr/>
+          <a:p/>
+        </p:txBody>
       </p:sp>
       <p:sp>
         <p:nvSpPr>
@@ -12902,6 +13254,10 @@
           </a:solidFill>
           <a:ln/>
         </p:spPr>
+        <p:txBody>
+          <a:bodyPr/>
+          <a:p/>
+        </p:txBody>
       </p:sp>
       <p:sp>
         <p:nvSpPr>
@@ -13010,6 +13366,10 @@
             <a:prstDash val="solid"/>
           </a:ln>
         </p:spPr>
+        <p:txBody>
+          <a:bodyPr/>
+          <a:p/>
+        </p:txBody>
       </p:sp>
       <p:sp>
         <p:nvSpPr>
@@ -13030,6 +13390,10 @@
           </a:solidFill>
           <a:ln/>
         </p:spPr>
+        <p:txBody>
+          <a:bodyPr/>
+          <a:p/>
+        </p:txBody>
       </p:sp>
       <p:sp>
         <p:nvSpPr>
@@ -13138,6 +13502,10 @@
             <a:prstDash val="solid"/>
           </a:ln>
         </p:spPr>
+        <p:txBody>
+          <a:bodyPr/>
+          <a:p/>
+        </p:txBody>
       </p:sp>
       <p:sp>
         <p:nvSpPr>
@@ -13158,6 +13526,10 @@
           </a:solidFill>
           <a:ln/>
         </p:spPr>
+        <p:txBody>
+          <a:bodyPr/>
+          <a:p/>
+        </p:txBody>
       </p:sp>
       <p:sp>
         <p:nvSpPr>
@@ -13266,6 +13638,10 @@
             <a:prstDash val="solid"/>
           </a:ln>
         </p:spPr>
+        <p:txBody>
+          <a:bodyPr/>
+          <a:p/>
+        </p:txBody>
       </p:sp>
       <p:sp>
         <p:nvSpPr>
@@ -13286,6 +13662,10 @@
           </a:solidFill>
           <a:ln/>
         </p:spPr>
+        <p:txBody>
+          <a:bodyPr/>
+          <a:p/>
+        </p:txBody>
       </p:sp>
       <p:sp>
         <p:nvSpPr>
@@ -13419,6 +13799,10 @@
           </a:solidFill>
           <a:ln/>
         </p:spPr>
+        <p:txBody>
+          <a:bodyPr/>
+          <a:p/>
+        </p:txBody>
       </p:sp>
       <p:sp>
         <p:nvSpPr>
@@ -13517,6 +13901,10 @@
           </a:solidFill>
           <a:ln/>
         </p:spPr>
+        <p:txBody>
+          <a:bodyPr/>
+          <a:p/>
+        </p:txBody>
       </p:sp>
       <p:sp>
         <p:nvSpPr>
@@ -13578,6 +13966,10 @@
           </a:solidFill>
           <a:ln/>
         </p:spPr>
+        <p:txBody>
+          <a:bodyPr/>
+          <a:p/>
+        </p:txBody>
       </p:sp>
       <p:sp>
         <p:nvSpPr>
@@ -13681,6 +14073,10 @@
           </a:solidFill>
           <a:ln/>
         </p:spPr>
+        <p:txBody>
+          <a:bodyPr/>
+          <a:p/>
+        </p:txBody>
       </p:sp>
       <p:sp>
         <p:nvSpPr>
@@ -13784,6 +14180,10 @@
           </a:solidFill>
           <a:ln/>
         </p:spPr>
+        <p:txBody>
+          <a:bodyPr/>
+          <a:p/>
+        </p:txBody>
       </p:sp>
       <p:sp>
         <p:nvSpPr>
@@ -13907,6 +14307,10 @@
           </a:solidFill>
           <a:ln/>
         </p:spPr>
+        <p:txBody>
+          <a:bodyPr/>
+          <a:p/>
+        </p:txBody>
       </p:sp>
       <p:sp>
         <p:nvSpPr>
@@ -14030,6 +14434,10 @@
           </a:solidFill>
           <a:ln/>
         </p:spPr>
+        <p:txBody>
+          <a:bodyPr/>
+          <a:p/>
+        </p:txBody>
       </p:sp>
       <p:sp>
         <p:nvSpPr>
@@ -14153,6 +14561,10 @@
           </a:solidFill>
           <a:ln/>
         </p:spPr>
+        <p:txBody>
+          <a:bodyPr/>
+          <a:p/>
+        </p:txBody>
       </p:sp>
       <p:sp>
         <p:nvSpPr>
@@ -14276,6 +14688,10 @@
           </a:solidFill>
           <a:ln/>
         </p:spPr>
+        <p:txBody>
+          <a:bodyPr/>
+          <a:p/>
+        </p:txBody>
       </p:sp>
       <p:sp>
         <p:nvSpPr>
@@ -14399,6 +14815,10 @@
           </a:solidFill>
           <a:ln/>
         </p:spPr>
+        <p:txBody>
+          <a:bodyPr/>
+          <a:p/>
+        </p:txBody>
       </p:sp>
       <p:sp>
         <p:nvSpPr>
@@ -14532,6 +14952,10 @@
           </a:solidFill>
           <a:ln/>
         </p:spPr>
+        <p:txBody>
+          <a:bodyPr/>
+          <a:p/>
+        </p:txBody>
       </p:sp>
       <p:sp>
         <p:nvSpPr>
@@ -14630,6 +15054,10 @@
           </a:solidFill>
           <a:ln/>
         </p:spPr>
+        <p:txBody>
+          <a:bodyPr/>
+          <a:p/>
+        </p:txBody>
       </p:sp>
       <p:sp>
         <p:nvSpPr>
@@ -19121,6 +19549,10 @@
           </a:solidFill>
           <a:ln/>
         </p:spPr>
+        <p:txBody>
+          <a:bodyPr/>
+          <a:p/>
+        </p:txBody>
       </p:sp>
       <p:sp>
         <p:nvSpPr>
@@ -19219,6 +19651,10 @@
           </a:solidFill>
           <a:ln/>
         </p:spPr>
+        <p:txBody>
+          <a:bodyPr/>
+          <a:p/>
+        </p:txBody>
       </p:sp>
       <p:sp>
         <p:nvSpPr>
@@ -19280,6 +19716,10 @@
           </a:solidFill>
           <a:ln/>
         </p:spPr>
+        <p:txBody>
+          <a:bodyPr/>
+          <a:p/>
+        </p:txBody>
       </p:sp>
       <p:sp>
         <p:nvSpPr>
@@ -19300,6 +19740,10 @@
           </a:solidFill>
           <a:ln/>
         </p:spPr>
+        <p:txBody>
+          <a:bodyPr/>
+          <a:p/>
+        </p:txBody>
       </p:sp>
       <p:sp>
         <p:nvSpPr>
@@ -19442,6 +19886,10 @@
           </a:solidFill>
           <a:ln/>
         </p:spPr>
+        <p:txBody>
+          <a:bodyPr/>
+          <a:p/>
+        </p:txBody>
       </p:sp>
       <p:sp>
         <p:nvSpPr>
@@ -19462,6 +19910,10 @@
           </a:solidFill>
           <a:ln/>
         </p:spPr>
+        <p:txBody>
+          <a:bodyPr/>
+          <a:p/>
+        </p:txBody>
       </p:sp>
       <p:sp>
         <p:nvSpPr>
@@ -19604,6 +20056,10 @@
           </a:solidFill>
           <a:ln/>
         </p:spPr>
+        <p:txBody>
+          <a:bodyPr/>
+          <a:p/>
+        </p:txBody>
       </p:sp>
       <p:sp>
         <p:nvSpPr>
@@ -19624,6 +20080,10 @@
           </a:solidFill>
           <a:ln/>
         </p:spPr>
+        <p:txBody>
+          <a:bodyPr/>
+          <a:p/>
+        </p:txBody>
       </p:sp>
       <p:sp>
         <p:nvSpPr>
@@ -19766,6 +20226,10 @@
           </a:solidFill>
           <a:ln/>
         </p:spPr>
+        <p:txBody>
+          <a:bodyPr/>
+          <a:p/>
+        </p:txBody>
       </p:sp>
       <p:sp>
         <p:nvSpPr>
@@ -19786,6 +20250,10 @@
           </a:solidFill>
           <a:ln/>
         </p:spPr>
+        <p:txBody>
+          <a:bodyPr/>
+          <a:p/>
+        </p:txBody>
       </p:sp>
       <p:sp>
         <p:nvSpPr>
@@ -19958,6 +20426,10 @@
           </a:solidFill>
           <a:ln/>
         </p:spPr>
+        <p:txBody>
+          <a:bodyPr/>
+          <a:p/>
+        </p:txBody>
       </p:sp>
       <p:sp>
         <p:nvSpPr>
@@ -20056,6 +20528,10 @@
           </a:solidFill>
           <a:ln/>
         </p:spPr>
+        <p:txBody>
+          <a:bodyPr/>
+          <a:p/>
+        </p:txBody>
       </p:sp>
       <p:sp>
         <p:nvSpPr>
@@ -20117,6 +20593,10 @@
           </a:solidFill>
           <a:ln/>
         </p:spPr>
+        <p:txBody>
+          <a:bodyPr/>
+          <a:p/>
+        </p:txBody>
       </p:sp>
       <p:sp>
         <p:nvSpPr>
@@ -20183,6 +20663,10 @@
             <a:prstDash val="solid"/>
           </a:ln>
         </p:spPr>
+        <p:txBody>
+          <a:bodyPr/>
+          <a:p/>
+        </p:txBody>
       </p:sp>
       <p:sp>
         <p:nvSpPr>
@@ -20288,6 +20772,10 @@
             <a:prstDash val="solid"/>
           </a:ln>
         </p:spPr>
+        <p:txBody>
+          <a:bodyPr/>
+          <a:p/>
+        </p:txBody>
       </p:sp>
       <p:sp>
         <p:nvSpPr>
@@ -20393,6 +20881,10 @@
             <a:prstDash val="solid"/>
           </a:ln>
         </p:spPr>
+        <p:txBody>
+          <a:bodyPr/>
+          <a:p/>
+        </p:txBody>
       </p:sp>
       <p:sp>
         <p:nvSpPr>
@@ -20498,6 +20990,10 @@
             <a:prstDash val="solid"/>
           </a:ln>
         </p:spPr>
+        <p:txBody>
+          <a:bodyPr/>
+          <a:p/>
+        </p:txBody>
       </p:sp>
       <p:sp>
         <p:nvSpPr>
@@ -20598,6 +21094,10 @@
           </a:solidFill>
           <a:ln/>
         </p:spPr>
+        <p:txBody>
+          <a:bodyPr/>
+          <a:p/>
+        </p:txBody>
       </p:sp>
       <p:sp>
         <p:nvSpPr>
